--- a/Slides/CSC6103/Presentation-Template.pptx
+++ b/Slides/CSC6103/Presentation-Template.pptx
@@ -6612,6 +6612,8 @@
                     </a:srgbClr>
                   </a:outerShdw>
                 </a:effectLst>
+                <a:latin typeface="Times New Roman" panose="02020603050405020304" pitchFamily="18" charset="0"/>
+                <a:cs typeface="Times New Roman" panose="02020603050405020304" pitchFamily="18" charset="0"/>
               </a:rPr>
               <a:t>Virtualization Techniques</a:t>
             </a:r>
@@ -6623,6 +6625,8 @@
                   </a:srgbClr>
                 </a:outerShdw>
               </a:effectLst>
+              <a:latin typeface="Times New Roman" panose="02020603050405020304" pitchFamily="18" charset="0"/>
+              <a:cs typeface="Times New Roman" panose="02020603050405020304" pitchFamily="18" charset="0"/>
             </a:endParaRPr>
           </a:p>
         </p:txBody>
@@ -6656,27 +6660,41 @@
                     </a:srgbClr>
                   </a:outerShdw>
                 </a:effectLst>
+                <a:latin typeface="Times New Roman" panose="02020603050405020304" pitchFamily="18" charset="0"/>
+                <a:cs typeface="Times New Roman" panose="02020603050405020304" pitchFamily="18" charset="0"/>
               </a:rPr>
               <a:t>Prof. Yeh-Ching Chung</a:t>
             </a:r>
           </a:p>
           <a:p>
             <a:r>
-              <a:rPr lang="en-US" altLang="zh-TW" sz="3200" dirty="0"/>
+              <a:rPr lang="en-US" altLang="zh-TW" sz="3200" dirty="0">
+                <a:latin typeface="Times New Roman" panose="02020603050405020304" pitchFamily="18" charset="0"/>
+                <a:cs typeface="Times New Roman" panose="02020603050405020304" pitchFamily="18" charset="0"/>
+              </a:rPr>
               <a:t>School of </a:t>
             </a:r>
             <a:r>
-              <a:rPr lang="en-US" altLang="zh-CN" sz="3200" dirty="0"/>
+              <a:rPr lang="en-US" altLang="zh-CN" sz="3200" dirty="0">
+                <a:latin typeface="Times New Roman" panose="02020603050405020304" pitchFamily="18" charset="0"/>
+                <a:cs typeface="Times New Roman" panose="02020603050405020304" pitchFamily="18" charset="0"/>
+              </a:rPr>
               <a:t>Data </a:t>
             </a:r>
             <a:r>
-              <a:rPr lang="en-US" altLang="zh-TW" sz="3200" dirty="0"/>
+              <a:rPr lang="en-US" altLang="zh-TW" sz="3200" dirty="0">
+                <a:latin typeface="Times New Roman" panose="02020603050405020304" pitchFamily="18" charset="0"/>
+                <a:cs typeface="Times New Roman" panose="02020603050405020304" pitchFamily="18" charset="0"/>
+              </a:rPr>
               <a:t>Science</a:t>
             </a:r>
           </a:p>
           <a:p>
             <a:r>
-              <a:rPr lang="en-US" altLang="zh-TW" sz="3200" dirty="0"/>
+              <a:rPr lang="en-US" altLang="zh-TW" sz="3200" dirty="0">
+                <a:latin typeface="Times New Roman" panose="02020603050405020304" pitchFamily="18" charset="0"/>
+                <a:cs typeface="Times New Roman" panose="02020603050405020304" pitchFamily="18" charset="0"/>
+              </a:rPr>
               <a:t>Chinese University of Hong Kong, Shenzhen</a:t>
             </a:r>
           </a:p>
